--- a/01-精益工具知识库/PPT/04-5S管理与看板详解.pptx
+++ b/01-精益工具知识库/PPT/04-5S管理与看板详解.pptx
@@ -1522,6 +1522,10 @@
             <a:prstDash val="solid"/>
           </a:ln>
         </p:spPr>
+        <p:txBody>
+          <a:bodyPr/>
+          <a:p/>
+        </p:txBody>
       </p:sp>
       <p:sp>
         <p:nvSpPr>
@@ -1547,6 +1551,10 @@
             <a:prstDash val="solid"/>
           </a:ln>
         </p:spPr>
+        <p:txBody>
+          <a:bodyPr/>
+          <a:p/>
+        </p:txBody>
       </p:sp>
       <p:sp>
         <p:nvSpPr>
@@ -1572,6 +1580,10 @@
             <a:prstDash val="solid"/>
           </a:ln>
         </p:spPr>
+        <p:txBody>
+          <a:bodyPr/>
+          <a:p/>
+        </p:txBody>
       </p:sp>
       <p:sp>
         <p:nvSpPr>
@@ -1701,7 +1713,7 @@
                 <a:ea typeface="Microsoft YaHei" pitchFamily="34" charset="-122"/>
                 <a:cs typeface="Microsoft YaHei" pitchFamily="34" charset="-120"/>
               </a:rPr>
-              <a:t>紧固件制造精益生产实践</a:t>
+              <a:t>制造精益生产实践</a:t>
             </a:r>
             <a:endParaRPr lang="en-US" sz="1600" dirty="0"/>
           </a:p>
@@ -1726,6 +1738,10 @@
           </a:solidFill>
           <a:ln/>
         </p:spPr>
+        <p:txBody>
+          <a:bodyPr/>
+          <a:p/>
+        </p:txBody>
       </p:sp>
       <p:sp>
         <p:nvSpPr>
@@ -1751,6 +1767,10 @@
             <a:prstDash val="solid"/>
           </a:ln>
         </p:spPr>
+        <p:txBody>
+          <a:bodyPr/>
+          <a:p/>
+        </p:txBody>
       </p:sp>
       <p:sp>
         <p:nvSpPr>
@@ -1847,6 +1867,10 @@
             <a:prstDash val="solid"/>
           </a:ln>
         </p:spPr>
+        <p:txBody>
+          <a:bodyPr/>
+          <a:p/>
+        </p:txBody>
       </p:sp>
       <p:sp>
         <p:nvSpPr>
@@ -1872,6 +1896,10 @@
             <a:prstDash val="solid"/>
           </a:ln>
         </p:spPr>
+        <p:txBody>
+          <a:bodyPr/>
+          <a:p/>
+        </p:txBody>
       </p:sp>
       <p:sp>
         <p:nvSpPr>
@@ -1945,7 +1973,7 @@
                 <a:ea typeface="Microsoft YaHei" pitchFamily="34" charset="-122"/>
                 <a:cs typeface="Microsoft YaHei" pitchFamily="34" charset="-120"/>
               </a:rPr>
-              <a:t>Five Steps of 5S · 紧固件制造应用</a:t>
+              <a:t>Five Steps of 5S · 制造应用</a:t>
             </a:r>
             <a:endParaRPr lang="en-US" sz="1300" dirty="0"/>
           </a:p>
@@ -1975,6 +2003,10 @@
             <a:prstDash val="solid"/>
           </a:ln>
         </p:spPr>
+        <p:txBody>
+          <a:bodyPr/>
+          <a:p/>
+        </p:txBody>
       </p:sp>
       <p:sp>
         <p:nvSpPr>
@@ -2041,6 +2073,10 @@
             <a:prstDash val="solid"/>
           </a:ln>
         </p:spPr>
+        <p:txBody>
+          <a:bodyPr/>
+          <a:p/>
+        </p:txBody>
       </p:sp>
       <p:sp>
         <p:nvSpPr>
@@ -2066,6 +2102,10 @@
             <a:prstDash val="solid"/>
           </a:ln>
         </p:spPr>
+        <p:txBody>
+          <a:bodyPr/>
+          <a:p/>
+        </p:txBody>
       </p:sp>
       <p:sp>
         <p:nvSpPr>
@@ -2091,6 +2131,10 @@
             <a:prstDash val="solid"/>
           </a:ln>
         </p:spPr>
+        <p:txBody>
+          <a:bodyPr/>
+          <a:p/>
+        </p:txBody>
       </p:sp>
       <p:sp>
         <p:nvSpPr>
@@ -2116,6 +2160,10 @@
             <a:prstDash val="solid"/>
           </a:ln>
         </p:spPr>
+        <p:txBody>
+          <a:bodyPr/>
+          <a:p/>
+        </p:txBody>
       </p:sp>
       <p:sp>
         <p:nvSpPr>
@@ -2253,6 +2301,10 @@
           </a:solidFill>
           <a:ln/>
         </p:spPr>
+        <p:txBody>
+          <a:bodyPr/>
+          <a:p/>
+        </p:txBody>
       </p:sp>
       <p:sp>
         <p:nvSpPr>
@@ -2312,6 +2364,10 @@
           </a:solidFill>
           <a:ln/>
         </p:spPr>
+        <p:txBody>
+          <a:bodyPr/>
+          <a:p/>
+        </p:txBody>
       </p:sp>
       <p:sp>
         <p:nvSpPr>
@@ -2332,6 +2388,10 @@
           </a:solidFill>
           <a:ln/>
         </p:spPr>
+        <p:txBody>
+          <a:bodyPr/>
+          <a:p/>
+        </p:txBody>
       </p:sp>
       <p:sp>
         <p:nvSpPr>
@@ -2391,6 +2451,10 @@
           </a:solidFill>
           <a:ln/>
         </p:spPr>
+        <p:txBody>
+          <a:bodyPr/>
+          <a:p/>
+        </p:txBody>
       </p:sp>
       <p:sp>
         <p:nvSpPr>
@@ -2450,6 +2514,10 @@
           </a:solidFill>
           <a:ln/>
         </p:spPr>
+        <p:txBody>
+          <a:bodyPr/>
+          <a:p/>
+        </p:txBody>
       </p:sp>
       <p:sp>
         <p:nvSpPr>
@@ -2514,6 +2582,10 @@
             <a:prstDash val="solid"/>
           </a:ln>
         </p:spPr>
+        <p:txBody>
+          <a:bodyPr/>
+          <a:p/>
+        </p:txBody>
       </p:sp>
       <p:sp>
         <p:nvSpPr>
@@ -2541,6 +2613,10 @@
             <a:prstDash val="solid"/>
           </a:ln>
         </p:spPr>
+        <p:txBody>
+          <a:bodyPr/>
+          <a:p/>
+        </p:txBody>
       </p:sp>
       <p:sp>
         <p:nvSpPr>
@@ -2566,6 +2642,10 @@
             <a:prstDash val="solid"/>
           </a:ln>
         </p:spPr>
+        <p:txBody>
+          <a:bodyPr/>
+          <a:p/>
+        </p:txBody>
       </p:sp>
       <p:sp>
         <p:nvSpPr>
@@ -2591,6 +2671,10 @@
             <a:prstDash val="solid"/>
           </a:ln>
         </p:spPr>
+        <p:txBody>
+          <a:bodyPr/>
+          <a:p/>
+        </p:txBody>
       </p:sp>
       <p:sp>
         <p:nvSpPr>
@@ -2616,6 +2700,10 @@
             <a:prstDash val="solid"/>
           </a:ln>
         </p:spPr>
+        <p:txBody>
+          <a:bodyPr/>
+          <a:p/>
+        </p:txBody>
       </p:sp>
       <p:sp>
         <p:nvSpPr>
@@ -2753,6 +2841,10 @@
           </a:solidFill>
           <a:ln/>
         </p:spPr>
+        <p:txBody>
+          <a:bodyPr/>
+          <a:p/>
+        </p:txBody>
       </p:sp>
       <p:sp>
         <p:nvSpPr>
@@ -2812,6 +2904,10 @@
           </a:solidFill>
           <a:ln/>
         </p:spPr>
+        <p:txBody>
+          <a:bodyPr/>
+          <a:p/>
+        </p:txBody>
       </p:sp>
       <p:sp>
         <p:nvSpPr>
@@ -2832,6 +2928,10 @@
           </a:solidFill>
           <a:ln/>
         </p:spPr>
+        <p:txBody>
+          <a:bodyPr/>
+          <a:p/>
+        </p:txBody>
       </p:sp>
       <p:sp>
         <p:nvSpPr>
@@ -2891,6 +2991,10 @@
           </a:solidFill>
           <a:ln/>
         </p:spPr>
+        <p:txBody>
+          <a:bodyPr/>
+          <a:p/>
+        </p:txBody>
       </p:sp>
       <p:sp>
         <p:nvSpPr>
@@ -2950,6 +3054,10 @@
           </a:solidFill>
           <a:ln/>
         </p:spPr>
+        <p:txBody>
+          <a:bodyPr/>
+          <a:p/>
+        </p:txBody>
       </p:sp>
       <p:sp>
         <p:nvSpPr>
@@ -3014,6 +3122,10 @@
             <a:prstDash val="solid"/>
           </a:ln>
         </p:spPr>
+        <p:txBody>
+          <a:bodyPr/>
+          <a:p/>
+        </p:txBody>
       </p:sp>
       <p:sp>
         <p:nvSpPr>
@@ -3041,6 +3153,10 @@
             <a:prstDash val="solid"/>
           </a:ln>
         </p:spPr>
+        <p:txBody>
+          <a:bodyPr/>
+          <a:p/>
+        </p:txBody>
       </p:sp>
       <p:sp>
         <p:nvSpPr>
@@ -3066,6 +3182,10 @@
             <a:prstDash val="solid"/>
           </a:ln>
         </p:spPr>
+        <p:txBody>
+          <a:bodyPr/>
+          <a:p/>
+        </p:txBody>
       </p:sp>
       <p:sp>
         <p:nvSpPr>
@@ -3091,6 +3211,10 @@
             <a:prstDash val="solid"/>
           </a:ln>
         </p:spPr>
+        <p:txBody>
+          <a:bodyPr/>
+          <a:p/>
+        </p:txBody>
       </p:sp>
       <p:sp>
         <p:nvSpPr>
@@ -3116,6 +3240,10 @@
             <a:prstDash val="solid"/>
           </a:ln>
         </p:spPr>
+        <p:txBody>
+          <a:bodyPr/>
+          <a:p/>
+        </p:txBody>
       </p:sp>
       <p:sp>
         <p:nvSpPr>
@@ -3253,6 +3381,10 @@
           </a:solidFill>
           <a:ln/>
         </p:spPr>
+        <p:txBody>
+          <a:bodyPr/>
+          <a:p/>
+        </p:txBody>
       </p:sp>
       <p:sp>
         <p:nvSpPr>
@@ -3312,6 +3444,10 @@
           </a:solidFill>
           <a:ln/>
         </p:spPr>
+        <p:txBody>
+          <a:bodyPr/>
+          <a:p/>
+        </p:txBody>
       </p:sp>
       <p:sp>
         <p:nvSpPr>
@@ -3332,6 +3468,10 @@
           </a:solidFill>
           <a:ln/>
         </p:spPr>
+        <p:txBody>
+          <a:bodyPr/>
+          <a:p/>
+        </p:txBody>
       </p:sp>
       <p:sp>
         <p:nvSpPr>
@@ -3391,6 +3531,10 @@
           </a:solidFill>
           <a:ln/>
         </p:spPr>
+        <p:txBody>
+          <a:bodyPr/>
+          <a:p/>
+        </p:txBody>
       </p:sp>
       <p:sp>
         <p:nvSpPr>
@@ -3450,6 +3594,10 @@
           </a:solidFill>
           <a:ln/>
         </p:spPr>
+        <p:txBody>
+          <a:bodyPr/>
+          <a:p/>
+        </p:txBody>
       </p:sp>
       <p:sp>
         <p:nvSpPr>
@@ -3514,6 +3662,10 @@
             <a:prstDash val="solid"/>
           </a:ln>
         </p:spPr>
+        <p:txBody>
+          <a:bodyPr/>
+          <a:p/>
+        </p:txBody>
       </p:sp>
       <p:sp>
         <p:nvSpPr>
@@ -3541,6 +3693,10 @@
             <a:prstDash val="solid"/>
           </a:ln>
         </p:spPr>
+        <p:txBody>
+          <a:bodyPr/>
+          <a:p/>
+        </p:txBody>
       </p:sp>
       <p:sp>
         <p:nvSpPr>
@@ -3566,6 +3722,10 @@
             <a:prstDash val="solid"/>
           </a:ln>
         </p:spPr>
+        <p:txBody>
+          <a:bodyPr/>
+          <a:p/>
+        </p:txBody>
       </p:sp>
       <p:sp>
         <p:nvSpPr>
@@ -3591,6 +3751,10 @@
             <a:prstDash val="solid"/>
           </a:ln>
         </p:spPr>
+        <p:txBody>
+          <a:bodyPr/>
+          <a:p/>
+        </p:txBody>
       </p:sp>
       <p:sp>
         <p:nvSpPr>
@@ -3616,6 +3780,10 @@
             <a:prstDash val="solid"/>
           </a:ln>
         </p:spPr>
+        <p:txBody>
+          <a:bodyPr/>
+          <a:p/>
+        </p:txBody>
       </p:sp>
       <p:sp>
         <p:nvSpPr>
@@ -3753,6 +3921,10 @@
           </a:solidFill>
           <a:ln/>
         </p:spPr>
+        <p:txBody>
+          <a:bodyPr/>
+          <a:p/>
+        </p:txBody>
       </p:sp>
       <p:sp>
         <p:nvSpPr>
@@ -3812,6 +3984,10 @@
           </a:solidFill>
           <a:ln/>
         </p:spPr>
+        <p:txBody>
+          <a:bodyPr/>
+          <a:p/>
+        </p:txBody>
       </p:sp>
       <p:sp>
         <p:nvSpPr>
@@ -3832,6 +4008,10 @@
           </a:solidFill>
           <a:ln/>
         </p:spPr>
+        <p:txBody>
+          <a:bodyPr/>
+          <a:p/>
+        </p:txBody>
       </p:sp>
       <p:sp>
         <p:nvSpPr>
@@ -3891,6 +4071,10 @@
           </a:solidFill>
           <a:ln/>
         </p:spPr>
+        <p:txBody>
+          <a:bodyPr/>
+          <a:p/>
+        </p:txBody>
       </p:sp>
       <p:sp>
         <p:nvSpPr>
@@ -3950,6 +4134,10 @@
           </a:solidFill>
           <a:ln/>
         </p:spPr>
+        <p:txBody>
+          <a:bodyPr/>
+          <a:p/>
+        </p:txBody>
       </p:sp>
       <p:sp>
         <p:nvSpPr>
@@ -4014,6 +4202,10 @@
             <a:prstDash val="solid"/>
           </a:ln>
         </p:spPr>
+        <p:txBody>
+          <a:bodyPr/>
+          <a:p/>
+        </p:txBody>
       </p:sp>
       <p:sp>
         <p:nvSpPr>
@@ -4041,6 +4233,10 @@
             <a:prstDash val="solid"/>
           </a:ln>
         </p:spPr>
+        <p:txBody>
+          <a:bodyPr/>
+          <a:p/>
+        </p:txBody>
       </p:sp>
       <p:sp>
         <p:nvSpPr>
@@ -4066,6 +4262,10 @@
             <a:prstDash val="solid"/>
           </a:ln>
         </p:spPr>
+        <p:txBody>
+          <a:bodyPr/>
+          <a:p/>
+        </p:txBody>
       </p:sp>
       <p:sp>
         <p:nvSpPr>
@@ -4091,6 +4291,10 @@
             <a:prstDash val="solid"/>
           </a:ln>
         </p:spPr>
+        <p:txBody>
+          <a:bodyPr/>
+          <a:p/>
+        </p:txBody>
       </p:sp>
       <p:sp>
         <p:nvSpPr>
@@ -4116,6 +4320,10 @@
             <a:prstDash val="solid"/>
           </a:ln>
         </p:spPr>
+        <p:txBody>
+          <a:bodyPr/>
+          <a:p/>
+        </p:txBody>
       </p:sp>
       <p:sp>
         <p:nvSpPr>
@@ -4253,6 +4461,10 @@
           </a:solidFill>
           <a:ln/>
         </p:spPr>
+        <p:txBody>
+          <a:bodyPr/>
+          <a:p/>
+        </p:txBody>
       </p:sp>
       <p:sp>
         <p:nvSpPr>
@@ -4312,6 +4524,10 @@
           </a:solidFill>
           <a:ln/>
         </p:spPr>
+        <p:txBody>
+          <a:bodyPr/>
+          <a:p/>
+        </p:txBody>
       </p:sp>
       <p:sp>
         <p:nvSpPr>
@@ -4332,6 +4548,10 @@
           </a:solidFill>
           <a:ln/>
         </p:spPr>
+        <p:txBody>
+          <a:bodyPr/>
+          <a:p/>
+        </p:txBody>
       </p:sp>
       <p:sp>
         <p:nvSpPr>
@@ -4391,6 +4611,10 @@
           </a:solidFill>
           <a:ln/>
         </p:spPr>
+        <p:txBody>
+          <a:bodyPr/>
+          <a:p/>
+        </p:txBody>
       </p:sp>
       <p:sp>
         <p:nvSpPr>
@@ -4450,6 +4674,10 @@
           </a:solidFill>
           <a:ln/>
         </p:spPr>
+        <p:txBody>
+          <a:bodyPr/>
+          <a:p/>
+        </p:txBody>
       </p:sp>
       <p:sp>
         <p:nvSpPr>
@@ -4516,6 +4744,10 @@
             <a:prstDash val="solid"/>
           </a:ln>
         </p:spPr>
+        <p:txBody>
+          <a:bodyPr/>
+          <a:p/>
+        </p:txBody>
       </p:sp>
       <p:sp>
         <p:nvSpPr>
@@ -4550,7 +4782,7 @@
                 <a:ea typeface="Microsoft YaHei" pitchFamily="34" charset="-122"/>
                 <a:cs typeface="Microsoft YaHei" pitchFamily="34" charset="-120"/>
               </a:rPr>
-              <a:t>紧固件制造要点：从原材料仓→冷镦车间→搓丝工位→热处理→表面处理→包装发货，全面推行5S确保品质与效率</a:t>
+              <a:t>制造要点：从原材料仓→机加工车间→精加工工位→热处理→表面处理→包装发货，全面推行5S确保品质与效率</a:t>
             </a:r>
             <a:endParaRPr lang="en-US" sz="1000" dirty="0"/>
           </a:p>
@@ -4612,6 +4844,10 @@
             <a:prstDash val="solid"/>
           </a:ln>
         </p:spPr>
+        <p:txBody>
+          <a:bodyPr/>
+          <a:p/>
+        </p:txBody>
       </p:sp>
       <p:sp>
         <p:nvSpPr>
@@ -4637,6 +4873,10 @@
             <a:prstDash val="solid"/>
           </a:ln>
         </p:spPr>
+        <p:txBody>
+          <a:bodyPr/>
+          <a:p/>
+        </p:txBody>
       </p:sp>
       <p:sp>
         <p:nvSpPr>
@@ -4740,6 +4980,10 @@
             <a:prstDash val="solid"/>
           </a:ln>
         </p:spPr>
+        <p:txBody>
+          <a:bodyPr/>
+          <a:p/>
+        </p:txBody>
       </p:sp>
       <p:sp>
         <p:nvSpPr>
@@ -4806,6 +5050,10 @@
             <a:prstDash val="solid"/>
           </a:ln>
         </p:spPr>
+        <p:txBody>
+          <a:bodyPr/>
+          <a:p/>
+        </p:txBody>
       </p:sp>
       <p:sp>
         <p:nvSpPr>
@@ -4831,6 +5079,10 @@
             <a:prstDash val="solid"/>
           </a:ln>
         </p:spPr>
+        <p:txBody>
+          <a:bodyPr/>
+          <a:p/>
+        </p:txBody>
       </p:sp>
       <p:sp>
         <p:nvSpPr>
@@ -4856,6 +5108,10 @@
             <a:prstDash val="solid"/>
           </a:ln>
         </p:spPr>
+        <p:txBody>
+          <a:bodyPr/>
+          <a:p/>
+        </p:txBody>
       </p:sp>
       <p:sp>
         <p:nvSpPr>
@@ -4961,6 +5217,10 @@
             <a:prstDash val="solid"/>
           </a:ln>
         </p:spPr>
+        <p:txBody>
+          <a:bodyPr/>
+          <a:p/>
+        </p:txBody>
       </p:sp>
       <p:sp>
         <p:nvSpPr>
@@ -5066,6 +5326,10 @@
             <a:prstDash val="solid"/>
           </a:ln>
         </p:spPr>
+        <p:txBody>
+          <a:bodyPr/>
+          <a:p/>
+        </p:txBody>
       </p:sp>
       <p:sp>
         <p:nvSpPr>
@@ -5171,6 +5435,10 @@
             <a:prstDash val="solid"/>
           </a:ln>
         </p:spPr>
+        <p:txBody>
+          <a:bodyPr/>
+          <a:p/>
+        </p:txBody>
       </p:sp>
       <p:sp>
         <p:nvSpPr>
@@ -5276,6 +5544,10 @@
             <a:prstDash val="solid"/>
           </a:ln>
         </p:spPr>
+        <p:txBody>
+          <a:bodyPr/>
+          <a:p/>
+        </p:txBody>
       </p:sp>
       <p:sp>
         <p:nvSpPr>
@@ -5381,6 +5653,10 @@
             <a:prstDash val="solid"/>
           </a:ln>
         </p:spPr>
+        <p:txBody>
+          <a:bodyPr/>
+          <a:p/>
+        </p:txBody>
       </p:sp>
       <p:sp>
         <p:nvSpPr>
@@ -5486,6 +5762,10 @@
             <a:prstDash val="solid"/>
           </a:ln>
         </p:spPr>
+        <p:txBody>
+          <a:bodyPr/>
+          <a:p/>
+        </p:txBody>
       </p:sp>
       <p:sp>
         <p:nvSpPr>
@@ -5511,6 +5791,10 @@
             <a:prstDash val="solid"/>
           </a:ln>
         </p:spPr>
+        <p:txBody>
+          <a:bodyPr/>
+          <a:p/>
+        </p:txBody>
       </p:sp>
       <p:sp>
         <p:nvSpPr>
@@ -5536,6 +5820,10 @@
             <a:prstDash val="solid"/>
           </a:ln>
         </p:spPr>
+        <p:txBody>
+          <a:bodyPr/>
+          <a:p/>
+        </p:txBody>
       </p:sp>
       <p:sp>
         <p:nvSpPr>
@@ -5641,6 +5929,10 @@
             <a:prstDash val="solid"/>
           </a:ln>
         </p:spPr>
+        <p:txBody>
+          <a:bodyPr/>
+          <a:p/>
+        </p:txBody>
       </p:sp>
       <p:sp>
         <p:nvSpPr>
@@ -5700,6 +5992,10 @@
           </a:solidFill>
           <a:ln/>
         </p:spPr>
+        <p:txBody>
+          <a:bodyPr/>
+          <a:p/>
+        </p:txBody>
       </p:sp>
       <p:sp>
         <p:nvSpPr>
@@ -5720,6 +6016,10 @@
           </a:solidFill>
           <a:ln/>
         </p:spPr>
+        <p:txBody>
+          <a:bodyPr/>
+          <a:p/>
+        </p:txBody>
       </p:sp>
       <p:sp>
         <p:nvSpPr>
@@ -5740,6 +6040,10 @@
           </a:solidFill>
           <a:ln/>
         </p:spPr>
+        <p:txBody>
+          <a:bodyPr/>
+          <a:p/>
+        </p:txBody>
       </p:sp>
       <p:sp>
         <p:nvSpPr>
@@ -5765,6 +6069,10 @@
             <a:prstDash val="solid"/>
           </a:ln>
         </p:spPr>
+        <p:txBody>
+          <a:bodyPr/>
+          <a:p/>
+        </p:txBody>
       </p:sp>
       <p:sp>
         <p:nvSpPr>
@@ -5790,6 +6098,10 @@
             <a:prstDash val="solid"/>
           </a:ln>
         </p:spPr>
+        <p:txBody>
+          <a:bodyPr/>
+          <a:p/>
+        </p:txBody>
       </p:sp>
       <p:sp>
         <p:nvSpPr>
@@ -5817,6 +6129,10 @@
             <a:prstDash val="solid"/>
           </a:ln>
         </p:spPr>
+        <p:txBody>
+          <a:bodyPr/>
+          <a:p/>
+        </p:txBody>
       </p:sp>
       <p:sp>
         <p:nvSpPr>
@@ -5881,6 +6197,10 @@
             <a:prstDash val="solid"/>
           </a:ln>
         </p:spPr>
+        <p:txBody>
+          <a:bodyPr/>
+          <a:p/>
+        </p:txBody>
       </p:sp>
       <p:sp>
         <p:nvSpPr>
@@ -5906,6 +6226,10 @@
             <a:prstDash val="solid"/>
           </a:ln>
         </p:spPr>
+        <p:txBody>
+          <a:bodyPr/>
+          <a:p/>
+        </p:txBody>
       </p:sp>
       <p:sp>
         <p:nvSpPr>
@@ -5931,6 +6255,10 @@
             <a:prstDash val="solid"/>
           </a:ln>
         </p:spPr>
+        <p:txBody>
+          <a:bodyPr/>
+          <a:p/>
+        </p:txBody>
       </p:sp>
       <p:sp>
         <p:nvSpPr>
@@ -5956,6 +6284,10 @@
             <a:prstDash val="solid"/>
           </a:ln>
         </p:spPr>
+        <p:txBody>
+          <a:bodyPr/>
+          <a:p/>
+        </p:txBody>
       </p:sp>
       <p:sp>
         <p:nvSpPr>
@@ -5981,6 +6313,10 @@
             <a:prstDash val="solid"/>
           </a:ln>
         </p:spPr>
+        <p:txBody>
+          <a:bodyPr/>
+          <a:p/>
+        </p:txBody>
       </p:sp>
       <p:sp>
         <p:nvSpPr>
@@ -6008,6 +6344,10 @@
             <a:prstDash val="solid"/>
           </a:ln>
         </p:spPr>
+        <p:txBody>
+          <a:bodyPr/>
+          <a:p/>
+        </p:txBody>
       </p:sp>
       <p:sp>
         <p:nvSpPr>
@@ -6113,6 +6453,10 @@
             <a:prstDash val="solid"/>
           </a:ln>
         </p:spPr>
+        <p:txBody>
+          <a:bodyPr/>
+          <a:p/>
+        </p:txBody>
       </p:sp>
       <p:sp>
         <p:nvSpPr>
@@ -6218,6 +6562,10 @@
             <a:prstDash val="solid"/>
           </a:ln>
         </p:spPr>
+        <p:txBody>
+          <a:bodyPr/>
+          <a:p/>
+        </p:txBody>
       </p:sp>
       <p:sp>
         <p:nvSpPr>
@@ -6323,6 +6671,10 @@
             <a:prstDash val="solid"/>
           </a:ln>
         </p:spPr>
+        <p:txBody>
+          <a:bodyPr/>
+          <a:p/>
+        </p:txBody>
       </p:sp>
       <p:sp>
         <p:nvSpPr>
@@ -6428,6 +6780,10 @@
             <a:prstDash val="solid"/>
           </a:ln>
         </p:spPr>
+        <p:txBody>
+          <a:bodyPr/>
+          <a:p/>
+        </p:txBody>
       </p:sp>
       <p:sp>
         <p:nvSpPr>
@@ -6453,6 +6809,10 @@
             <a:prstDash val="solid"/>
           </a:ln>
         </p:spPr>
+        <p:txBody>
+          <a:bodyPr/>
+          <a:p/>
+        </p:txBody>
       </p:sp>
       <p:sp>
         <p:nvSpPr>
@@ -6478,6 +6838,10 @@
             <a:prstDash val="solid"/>
           </a:ln>
         </p:spPr>
+        <p:txBody>
+          <a:bodyPr/>
+          <a:p/>
+        </p:txBody>
       </p:sp>
       <p:sp>
         <p:nvSpPr>
@@ -6583,6 +6947,10 @@
             <a:prstDash val="solid"/>
           </a:ln>
         </p:spPr>
+        <p:txBody>
+          <a:bodyPr/>
+          <a:p/>
+        </p:txBody>
       </p:sp>
       <p:sp>
         <p:nvSpPr>
@@ -6649,6 +7017,10 @@
             <a:prstDash val="dash"/>
           </a:ln>
         </p:spPr>
+        <p:txBody>
+          <a:bodyPr/>
+          <a:p/>
+        </p:txBody>
       </p:sp>
       <p:sp>
         <p:nvSpPr>
@@ -6674,6 +7046,10 @@
             <a:prstDash val="dash"/>
           </a:ln>
         </p:spPr>
+        <p:txBody>
+          <a:bodyPr/>
+          <a:p/>
+        </p:txBody>
       </p:sp>
       <p:sp>
         <p:nvSpPr>
@@ -6699,6 +7075,10 @@
             <a:prstDash val="dash"/>
           </a:ln>
         </p:spPr>
+        <p:txBody>
+          <a:bodyPr/>
+          <a:p/>
+        </p:txBody>
       </p:sp>
       <p:sp>
         <p:nvSpPr>
@@ -6724,6 +7104,10 @@
             <a:prstDash val="dash"/>
           </a:ln>
         </p:spPr>
+        <p:txBody>
+          <a:bodyPr/>
+          <a:p/>
+        </p:txBody>
       </p:sp>
       <p:sp>
         <p:nvSpPr>
@@ -6783,6 +7167,10 @@
           </a:solidFill>
           <a:ln/>
         </p:spPr>
+        <p:txBody>
+          <a:bodyPr/>
+          <a:p/>
+        </p:txBody>
       </p:sp>
       <p:sp>
         <p:nvSpPr>
@@ -6817,7 +7205,7 @@
                 <a:ea typeface="Microsoft YaHei" pitchFamily="34" charset="-122"/>
                 <a:cs typeface="Microsoft YaHei" pitchFamily="34" charset="-120"/>
               </a:rPr>
-              <a:t>A区 - 冷镦车间</a:t>
+              <a:t>A区 - 机加工车间</a:t>
             </a:r>
             <a:endParaRPr lang="en-US" sz="850" dirty="0"/>
           </a:p>
@@ -6842,6 +7230,10 @@
           </a:solidFill>
           <a:ln/>
         </p:spPr>
+        <p:txBody>
+          <a:bodyPr/>
+          <a:p/>
+        </p:txBody>
       </p:sp>
       <p:sp>
         <p:nvSpPr>
@@ -6876,7 +7268,7 @@
                 <a:ea typeface="Microsoft YaHei" pitchFamily="34" charset="-122"/>
                 <a:cs typeface="Microsoft YaHei" pitchFamily="34" charset="-120"/>
               </a:rPr>
-              <a:t>B区 - 搓丝工位</a:t>
+              <a:t>B区 - 精加工工位</a:t>
             </a:r>
             <a:endParaRPr lang="en-US" sz="850" dirty="0"/>
           </a:p>
@@ -6901,6 +7293,10 @@
           </a:solidFill>
           <a:ln/>
         </p:spPr>
+        <p:txBody>
+          <a:bodyPr/>
+          <a:p/>
+        </p:txBody>
       </p:sp>
       <p:sp>
         <p:nvSpPr>
@@ -6960,6 +7356,10 @@
           </a:solidFill>
           <a:ln/>
         </p:spPr>
+        <p:txBody>
+          <a:bodyPr/>
+          <a:p/>
+        </p:txBody>
       </p:sp>
       <p:sp>
         <p:nvSpPr>
@@ -7019,6 +7419,10 @@
           </a:solidFill>
           <a:ln/>
         </p:spPr>
+        <p:txBody>
+          <a:bodyPr/>
+          <a:p/>
+        </p:txBody>
       </p:sp>
       <p:sp>
         <p:nvSpPr>
@@ -7115,6 +7519,10 @@
             <a:prstDash val="solid"/>
           </a:ln>
         </p:spPr>
+        <p:txBody>
+          <a:bodyPr/>
+          <a:p/>
+        </p:txBody>
       </p:sp>
       <p:sp>
         <p:nvSpPr>
@@ -7140,6 +7548,10 @@
             <a:prstDash val="solid"/>
           </a:ln>
         </p:spPr>
+        <p:txBody>
+          <a:bodyPr/>
+          <a:p/>
+        </p:txBody>
       </p:sp>
       <p:sp>
         <p:nvSpPr>
@@ -7243,6 +7655,10 @@
             <a:prstDash val="solid"/>
           </a:ln>
         </p:spPr>
+        <p:txBody>
+          <a:bodyPr/>
+          <a:p/>
+        </p:txBody>
       </p:sp>
       <p:sp>
         <p:nvSpPr>
@@ -7309,6 +7725,10 @@
             <a:prstDash val="solid"/>
           </a:ln>
         </p:spPr>
+        <p:txBody>
+          <a:bodyPr/>
+          <a:p/>
+        </p:txBody>
       </p:sp>
       <p:sp>
         <p:nvSpPr>
@@ -7334,6 +7754,10 @@
             <a:prstDash val="solid"/>
           </a:ln>
         </p:spPr>
+        <p:txBody>
+          <a:bodyPr/>
+          <a:p/>
+        </p:txBody>
       </p:sp>
       <p:sp>
         <p:nvSpPr>
@@ -7393,6 +7817,10 @@
           </a:solidFill>
           <a:ln/>
         </p:spPr>
+        <p:txBody>
+          <a:bodyPr/>
+          <a:p/>
+        </p:txBody>
       </p:sp>
       <p:sp>
         <p:nvSpPr>
@@ -7530,6 +7958,10 @@
           </a:solidFill>
           <a:ln/>
         </p:spPr>
+        <p:txBody>
+          <a:bodyPr/>
+          <a:p/>
+        </p:txBody>
       </p:sp>
       <p:sp>
         <p:nvSpPr>
@@ -7667,6 +8099,10 @@
           </a:solidFill>
           <a:ln/>
         </p:spPr>
+        <p:txBody>
+          <a:bodyPr/>
+          <a:p/>
+        </p:txBody>
       </p:sp>
       <p:sp>
         <p:nvSpPr>
@@ -7804,6 +8240,10 @@
           </a:solidFill>
           <a:ln/>
         </p:spPr>
+        <p:txBody>
+          <a:bodyPr/>
+          <a:p/>
+        </p:txBody>
       </p:sp>
       <p:sp>
         <p:nvSpPr>
@@ -7941,6 +8381,10 @@
           </a:solidFill>
           <a:ln/>
         </p:spPr>
+        <p:txBody>
+          <a:bodyPr/>
+          <a:p/>
+        </p:txBody>
       </p:sp>
       <p:sp>
         <p:nvSpPr>
@@ -8078,6 +8522,10 @@
           </a:solidFill>
           <a:ln/>
         </p:spPr>
+        <p:txBody>
+          <a:bodyPr/>
+          <a:p/>
+        </p:txBody>
       </p:sp>
       <p:sp>
         <p:nvSpPr>
@@ -8222,6 +8670,10 @@
             <a:prstDash val="solid"/>
           </a:ln>
         </p:spPr>
+        <p:txBody>
+          <a:bodyPr/>
+          <a:p/>
+        </p:txBody>
       </p:sp>
       <p:sp>
         <p:nvSpPr>
@@ -8281,6 +8733,10 @@
           </a:solidFill>
           <a:ln/>
         </p:spPr>
+        <p:txBody>
+          <a:bodyPr/>
+          <a:p/>
+        </p:txBody>
       </p:sp>
       <p:sp>
         <p:nvSpPr>
@@ -8340,6 +8796,10 @@
           </a:solidFill>
           <a:ln/>
         </p:spPr>
+        <p:txBody>
+          <a:bodyPr/>
+          <a:p/>
+        </p:txBody>
       </p:sp>
       <p:sp>
         <p:nvSpPr>
@@ -8399,6 +8859,10 @@
           </a:solidFill>
           <a:ln/>
         </p:spPr>
+        <p:txBody>
+          <a:bodyPr/>
+          <a:p/>
+        </p:txBody>
       </p:sp>
       <p:sp>
         <p:nvSpPr>
@@ -8458,6 +8922,10 @@
           </a:solidFill>
           <a:ln/>
         </p:spPr>
+        <p:txBody>
+          <a:bodyPr/>
+          <a:p/>
+        </p:txBody>
       </p:sp>
       <p:sp>
         <p:nvSpPr>
@@ -8563,6 +9031,10 @@
             <a:prstDash val="solid"/>
           </a:ln>
         </p:spPr>
+        <p:txBody>
+          <a:bodyPr/>
+          <a:p/>
+        </p:txBody>
       </p:sp>
       <p:sp>
         <p:nvSpPr>
@@ -8588,6 +9060,10 @@
             <a:prstDash val="solid"/>
           </a:ln>
         </p:spPr>
+        <p:txBody>
+          <a:bodyPr/>
+          <a:p/>
+        </p:txBody>
       </p:sp>
       <p:sp>
         <p:nvSpPr>
@@ -8622,7 +9098,7 @@
                 <a:ea typeface="Microsoft YaHei" pitchFamily="34" charset="-122"/>
                 <a:cs typeface="Microsoft YaHei" pitchFamily="34" charset="-120"/>
               </a:rPr>
-              <a:t>紧固件工厂 5S 改善案例</a:t>
+              <a:t>制造工厂 5S 改善案例</a:t>
             </a:r>
             <a:endParaRPr lang="en-US" sz="1400" dirty="0"/>
           </a:p>
@@ -8654,6 +9130,10 @@
             <a:prstDash val="solid"/>
           </a:ln>
         </p:spPr>
+        <p:txBody>
+          <a:bodyPr/>
+          <a:p/>
+        </p:txBody>
       </p:sp>
       <p:sp>
         <p:nvSpPr>
@@ -8674,6 +9154,10 @@
           </a:solidFill>
           <a:ln/>
         </p:spPr>
+        <p:txBody>
+          <a:bodyPr/>
+          <a:p/>
+        </p:txBody>
       </p:sp>
       <p:sp>
         <p:nvSpPr>
@@ -8777,6 +9261,10 @@
             <a:prstDash val="solid"/>
           </a:ln>
         </p:spPr>
+        <p:txBody>
+          <a:bodyPr/>
+          <a:p/>
+        </p:txBody>
       </p:sp>
       <p:sp>
         <p:nvSpPr>
@@ -8843,6 +9331,10 @@
             <a:prstDash val="solid"/>
           </a:ln>
         </p:spPr>
+        <p:txBody>
+          <a:bodyPr/>
+          <a:p/>
+        </p:txBody>
       </p:sp>
       <p:sp>
         <p:nvSpPr>
@@ -8909,6 +9401,10 @@
             <a:prstDash val="solid"/>
           </a:ln>
         </p:spPr>
+        <p:txBody>
+          <a:bodyPr/>
+          <a:p/>
+        </p:txBody>
       </p:sp>
       <p:sp>
         <p:nvSpPr>
@@ -8929,6 +9425,10 @@
           </a:solidFill>
           <a:ln/>
         </p:spPr>
+        <p:txBody>
+          <a:bodyPr/>
+          <a:p/>
+        </p:txBody>
       </p:sp>
       <p:sp>
         <p:nvSpPr>
@@ -9032,6 +9532,10 @@
             <a:prstDash val="solid"/>
           </a:ln>
         </p:spPr>
+        <p:txBody>
+          <a:bodyPr/>
+          <a:p/>
+        </p:txBody>
       </p:sp>
       <p:sp>
         <p:nvSpPr>
@@ -9098,6 +9602,10 @@
             <a:prstDash val="solid"/>
           </a:ln>
         </p:spPr>
+        <p:txBody>
+          <a:bodyPr/>
+          <a:p/>
+        </p:txBody>
       </p:sp>
       <p:sp>
         <p:nvSpPr>
@@ -9164,6 +9672,10 @@
             <a:prstDash val="solid"/>
           </a:ln>
         </p:spPr>
+        <p:txBody>
+          <a:bodyPr/>
+          <a:p/>
+        </p:txBody>
       </p:sp>
       <p:sp>
         <p:nvSpPr>
@@ -9184,6 +9696,10 @@
           </a:solidFill>
           <a:ln/>
         </p:spPr>
+        <p:txBody>
+          <a:bodyPr/>
+          <a:p/>
+        </p:txBody>
       </p:sp>
       <p:sp>
         <p:nvSpPr>
@@ -9287,6 +9803,10 @@
             <a:prstDash val="solid"/>
           </a:ln>
         </p:spPr>
+        <p:txBody>
+          <a:bodyPr/>
+          <a:p/>
+        </p:txBody>
       </p:sp>
       <p:sp>
         <p:nvSpPr>
@@ -9353,6 +9873,10 @@
             <a:prstDash val="solid"/>
           </a:ln>
         </p:spPr>
+        <p:txBody>
+          <a:bodyPr/>
+          <a:p/>
+        </p:txBody>
       </p:sp>
       <p:sp>
         <p:nvSpPr>
@@ -9419,6 +9943,10 @@
             <a:prstDash val="solid"/>
           </a:ln>
         </p:spPr>
+        <p:txBody>
+          <a:bodyPr/>
+          <a:p/>
+        </p:txBody>
       </p:sp>
       <p:sp>
         <p:nvSpPr>
@@ -9439,6 +9967,10 @@
           </a:solidFill>
           <a:ln/>
         </p:spPr>
+        <p:txBody>
+          <a:bodyPr/>
+          <a:p/>
+        </p:txBody>
       </p:sp>
       <p:sp>
         <p:nvSpPr>
@@ -9542,6 +10074,10 @@
             <a:prstDash val="solid"/>
           </a:ln>
         </p:spPr>
+        <p:txBody>
+          <a:bodyPr/>
+          <a:p/>
+        </p:txBody>
       </p:sp>
       <p:sp>
         <p:nvSpPr>
@@ -9608,6 +10144,10 @@
             <a:prstDash val="solid"/>
           </a:ln>
         </p:spPr>
+        <p:txBody>
+          <a:bodyPr/>
+          <a:p/>
+        </p:txBody>
       </p:sp>
       <p:sp>
         <p:nvSpPr>
@@ -9704,6 +10244,10 @@
             <a:prstDash val="solid"/>
           </a:ln>
         </p:spPr>
+        <p:txBody>
+          <a:bodyPr/>
+          <a:p/>
+        </p:txBody>
       </p:sp>
       <p:sp>
         <p:nvSpPr>
@@ -9729,6 +10273,10 @@
             <a:prstDash val="solid"/>
           </a:ln>
         </p:spPr>
+        <p:txBody>
+          <a:bodyPr/>
+          <a:p/>
+        </p:txBody>
       </p:sp>
       <p:sp>
         <p:nvSpPr>
@@ -9832,6 +10380,10 @@
             <a:prstDash val="solid"/>
           </a:ln>
         </p:spPr>
+        <p:txBody>
+          <a:bodyPr/>
+          <a:p/>
+        </p:txBody>
       </p:sp>
       <p:sp>
         <p:nvSpPr>
@@ -9898,6 +10450,10 @@
             <a:prstDash val="solid"/>
           </a:ln>
         </p:spPr>
+        <p:txBody>
+          <a:bodyPr/>
+          <a:p/>
+        </p:txBody>
       </p:sp>
       <p:sp>
         <p:nvSpPr>
@@ -10042,6 +10598,10 @@
             <a:prstDash val="solid"/>
           </a:ln>
         </p:spPr>
+        <p:txBody>
+          <a:bodyPr/>
+          <a:p/>
+        </p:txBody>
       </p:sp>
       <p:sp>
         <p:nvSpPr>
@@ -10069,6 +10629,10 @@
             <a:prstDash val="solid"/>
           </a:ln>
         </p:spPr>
+        <p:txBody>
+          <a:bodyPr/>
+          <a:p/>
+        </p:txBody>
       </p:sp>
       <p:sp>
         <p:nvSpPr>
@@ -10094,6 +10658,10 @@
             <a:prstDash val="solid"/>
           </a:ln>
         </p:spPr>
+        <p:txBody>
+          <a:bodyPr/>
+          <a:p/>
+        </p:txBody>
       </p:sp>
       <p:sp>
         <p:nvSpPr>
@@ -10119,6 +10687,10 @@
             <a:prstDash val="solid"/>
           </a:ln>
         </p:spPr>
+        <p:txBody>
+          <a:bodyPr/>
+          <a:p/>
+        </p:txBody>
       </p:sp>
       <p:sp>
         <p:nvSpPr>
@@ -10256,6 +10828,10 @@
           </a:solidFill>
           <a:ln/>
         </p:spPr>
+        <p:txBody>
+          <a:bodyPr/>
+          <a:p/>
+        </p:txBody>
       </p:sp>
       <p:sp>
         <p:nvSpPr>
@@ -10315,6 +10891,10 @@
           </a:solidFill>
           <a:ln/>
         </p:spPr>
+        <p:txBody>
+          <a:bodyPr/>
+          <a:p/>
+        </p:txBody>
       </p:sp>
       <p:sp>
         <p:nvSpPr>
@@ -10374,6 +10954,10 @@
           </a:solidFill>
           <a:ln/>
         </p:spPr>
+        <p:txBody>
+          <a:bodyPr/>
+          <a:p/>
+        </p:txBody>
       </p:sp>
       <p:sp>
         <p:nvSpPr>
@@ -10440,6 +11024,10 @@
             <a:prstDash val="solid"/>
           </a:ln>
         </p:spPr>
+        <p:txBody>
+          <a:bodyPr/>
+          <a:p/>
+        </p:txBody>
       </p:sp>
       <p:sp>
         <p:nvSpPr>
@@ -10467,6 +11055,10 @@
             <a:prstDash val="solid"/>
           </a:ln>
         </p:spPr>
+        <p:txBody>
+          <a:bodyPr/>
+          <a:p/>
+        </p:txBody>
       </p:sp>
       <p:sp>
         <p:nvSpPr>
@@ -10492,6 +11084,10 @@
             <a:prstDash val="solid"/>
           </a:ln>
         </p:spPr>
+        <p:txBody>
+          <a:bodyPr/>
+          <a:p/>
+        </p:txBody>
       </p:sp>
       <p:sp>
         <p:nvSpPr>
@@ -10517,6 +11113,10 @@
             <a:prstDash val="solid"/>
           </a:ln>
         </p:spPr>
+        <p:txBody>
+          <a:bodyPr/>
+          <a:p/>
+        </p:txBody>
       </p:sp>
       <p:sp>
         <p:nvSpPr>
@@ -10654,6 +11254,10 @@
           </a:solidFill>
           <a:ln/>
         </p:spPr>
+        <p:txBody>
+          <a:bodyPr/>
+          <a:p/>
+        </p:txBody>
       </p:sp>
       <p:sp>
         <p:nvSpPr>
@@ -10713,6 +11317,10 @@
           </a:solidFill>
           <a:ln/>
         </p:spPr>
+        <p:txBody>
+          <a:bodyPr/>
+          <a:p/>
+        </p:txBody>
       </p:sp>
       <p:sp>
         <p:nvSpPr>
@@ -10772,6 +11380,10 @@
           </a:solidFill>
           <a:ln/>
         </p:spPr>
+        <p:txBody>
+          <a:bodyPr/>
+          <a:p/>
+        </p:txBody>
       </p:sp>
       <p:sp>
         <p:nvSpPr>
@@ -10838,6 +11450,10 @@
             <a:prstDash val="solid"/>
           </a:ln>
         </p:spPr>
+        <p:txBody>
+          <a:bodyPr/>
+          <a:p/>
+        </p:txBody>
       </p:sp>
       <p:sp>
         <p:nvSpPr>
@@ -10865,6 +11481,10 @@
             <a:prstDash val="solid"/>
           </a:ln>
         </p:spPr>
+        <p:txBody>
+          <a:bodyPr/>
+          <a:p/>
+        </p:txBody>
       </p:sp>
       <p:sp>
         <p:nvSpPr>
@@ -10890,6 +11510,10 @@
             <a:prstDash val="solid"/>
           </a:ln>
         </p:spPr>
+        <p:txBody>
+          <a:bodyPr/>
+          <a:p/>
+        </p:txBody>
       </p:sp>
       <p:sp>
         <p:nvSpPr>
@@ -10915,6 +11539,10 @@
             <a:prstDash val="solid"/>
           </a:ln>
         </p:spPr>
+        <p:txBody>
+          <a:bodyPr/>
+          <a:p/>
+        </p:txBody>
       </p:sp>
       <p:sp>
         <p:nvSpPr>
@@ -11052,6 +11680,10 @@
           </a:solidFill>
           <a:ln/>
         </p:spPr>
+        <p:txBody>
+          <a:bodyPr/>
+          <a:p/>
+        </p:txBody>
       </p:sp>
       <p:sp>
         <p:nvSpPr>
@@ -11111,6 +11743,10 @@
           </a:solidFill>
           <a:ln/>
         </p:spPr>
+        <p:txBody>
+          <a:bodyPr/>
+          <a:p/>
+        </p:txBody>
       </p:sp>
       <p:sp>
         <p:nvSpPr>
@@ -11170,6 +11806,10 @@
           </a:solidFill>
           <a:ln/>
         </p:spPr>
+        <p:txBody>
+          <a:bodyPr/>
+          <a:p/>
+        </p:txBody>
       </p:sp>
       <p:sp>
         <p:nvSpPr>
@@ -11236,6 +11876,10 @@
             <a:prstDash val="solid"/>
           </a:ln>
         </p:spPr>
+        <p:txBody>
+          <a:bodyPr/>
+          <a:p/>
+        </p:txBody>
       </p:sp>
       <p:sp>
         <p:nvSpPr>
@@ -11270,7 +11914,7 @@
                 <a:ea typeface="Microsoft YaHei" pitchFamily="34" charset="-122"/>
                 <a:cs typeface="Microsoft YaHei" pitchFamily="34" charset="-120"/>
               </a:rPr>
-              <a:t>看板循环流程：供应商 → [原料仓] → [冷镦工序] → [搓丝工序] → [热处理] → [表面处理] → [包装发货] → 客户    ·    信息流（看板）逆流而下，物流顺流而下</a:t>
+              <a:t>看板循环流程：供应商 → [原料仓] → [机加工工序] → [精加工工序] → [热处理] → [表面处理] → [包装发货] → 客户    ·    信息流（看板）逆流而下，物流顺流而下</a:t>
             </a:r>
             <a:endParaRPr lang="en-US" sz="900" dirty="0"/>
           </a:p>
@@ -11332,6 +11976,10 @@
             <a:prstDash val="solid"/>
           </a:ln>
         </p:spPr>
+        <p:txBody>
+          <a:bodyPr/>
+          <a:p/>
+        </p:txBody>
       </p:sp>
       <p:sp>
         <p:nvSpPr>
@@ -11357,6 +12005,10 @@
             <a:prstDash val="solid"/>
           </a:ln>
         </p:spPr>
+        <p:txBody>
+          <a:bodyPr/>
+          <a:p/>
+        </p:txBody>
       </p:sp>
       <p:sp>
         <p:nvSpPr>
@@ -11460,6 +12112,10 @@
             <a:prstDash val="solid"/>
           </a:ln>
         </p:spPr>
+        <p:txBody>
+          <a:bodyPr/>
+          <a:p/>
+        </p:txBody>
       </p:sp>
       <p:sp>
         <p:nvSpPr>
@@ -11526,6 +12182,10 @@
             <a:prstDash val="solid"/>
           </a:ln>
         </p:spPr>
+        <p:txBody>
+          <a:bodyPr/>
+          <a:p/>
+        </p:txBody>
       </p:sp>
       <p:sp>
         <p:nvSpPr>
@@ -11551,6 +12211,10 @@
             <a:prstDash val="solid"/>
           </a:ln>
         </p:spPr>
+        <p:txBody>
+          <a:bodyPr/>
+          <a:p/>
+        </p:txBody>
       </p:sp>
       <p:sp>
         <p:nvSpPr>
@@ -11656,6 +12320,10 @@
             <a:prstDash val="solid"/>
           </a:ln>
         </p:spPr>
+        <p:txBody>
+          <a:bodyPr/>
+          <a:p/>
+        </p:txBody>
       </p:sp>
       <p:sp>
         <p:nvSpPr>
@@ -11761,6 +12429,10 @@
             <a:prstDash val="solid"/>
           </a:ln>
         </p:spPr>
+        <p:txBody>
+          <a:bodyPr/>
+          <a:p/>
+        </p:txBody>
       </p:sp>
       <p:sp>
         <p:nvSpPr>
@@ -11866,6 +12538,10 @@
             <a:prstDash val="solid"/>
           </a:ln>
         </p:spPr>
+        <p:txBody>
+          <a:bodyPr/>
+          <a:p/>
+        </p:txBody>
       </p:sp>
       <p:sp>
         <p:nvSpPr>
@@ -11971,6 +12647,10 @@
             <a:prstDash val="solid"/>
           </a:ln>
         </p:spPr>
+        <p:txBody>
+          <a:bodyPr/>
+          <a:p/>
+        </p:txBody>
       </p:sp>
       <p:sp>
         <p:nvSpPr>
@@ -12076,6 +12756,10 @@
             <a:prstDash val="solid"/>
           </a:ln>
         </p:spPr>
+        <p:txBody>
+          <a:bodyPr/>
+          <a:p/>
+        </p:txBody>
       </p:sp>
       <p:sp>
         <p:nvSpPr>
@@ -12101,6 +12785,10 @@
             <a:prstDash val="solid"/>
           </a:ln>
         </p:spPr>
+        <p:txBody>
+          <a:bodyPr/>
+          <a:p/>
+        </p:txBody>
       </p:sp>
       <p:sp>
         <p:nvSpPr>
@@ -12135,7 +12823,7 @@
                 <a:ea typeface="Microsoft YaHei" pitchFamily="34" charset="-122"/>
                 <a:cs typeface="Microsoft YaHei" pitchFamily="34" charset="-120"/>
               </a:rPr>
-              <a:t>螺栓生产实例计算</a:t>
+              <a:t>工件生产实例计算</a:t>
             </a:r>
             <a:endParaRPr lang="en-US" sz="1400" dirty="0"/>
           </a:p>
@@ -12213,7 +12901,7 @@
                 <a:ea typeface="Arial" pitchFamily="34" charset="-122"/>
                 <a:cs typeface="Arial" pitchFamily="34" charset="-120"/>
               </a:rPr>
-              <a:t>M10×50 六角螺栓</a:t>
+              <a:t>某型号×50 工件</a:t>
             </a:r>
             <a:endParaRPr lang="en-US" sz="900" dirty="0"/>
           </a:p>
@@ -12369,7 +13057,7 @@
                 <a:ea typeface="Arial" pitchFamily="34" charset="-122"/>
                 <a:cs typeface="Arial" pitchFamily="34" charset="-120"/>
               </a:rPr>
-              <a:t>冷镦→包装: 0.5天</a:t>
+              <a:t>机加工→包装: 0.5天</a:t>
             </a:r>
             <a:endParaRPr lang="en-US" sz="900" dirty="0"/>
           </a:p>
@@ -12557,6 +13245,10 @@
             <a:prstDash val="solid"/>
           </a:ln>
         </p:spPr>
+        <p:txBody>
+          <a:bodyPr/>
+          <a:p/>
+        </p:txBody>
       </p:sp>
       <p:sp>
         <p:nvSpPr>
@@ -12740,6 +13432,10 @@
             <a:prstDash val="solid"/>
           </a:ln>
         </p:spPr>
+        <p:txBody>
+          <a:bodyPr/>
+          <a:p/>
+        </p:txBody>
       </p:sp>
       <p:sp>
         <p:nvSpPr>
@@ -12923,6 +13619,10 @@
             <a:prstDash val="solid"/>
           </a:ln>
         </p:spPr>
+        <p:txBody>
+          <a:bodyPr/>
+          <a:p/>
+        </p:txBody>
       </p:sp>
       <p:sp>
         <p:nvSpPr>
@@ -12982,6 +13682,10 @@
           </a:solidFill>
           <a:ln/>
         </p:spPr>
+        <p:txBody>
+          <a:bodyPr/>
+          <a:p/>
+        </p:txBody>
       </p:sp>
       <p:sp>
         <p:nvSpPr>
@@ -13097,6 +13801,10 @@
           </a:solidFill>
           <a:ln/>
         </p:spPr>
+        <p:txBody>
+          <a:bodyPr/>
+          <a:p/>
+        </p:txBody>
       </p:sp>
       <p:sp>
         <p:nvSpPr>
@@ -13212,6 +13920,10 @@
           </a:solidFill>
           <a:ln/>
         </p:spPr>
+        <p:txBody>
+          <a:bodyPr/>
+          <a:p/>
+        </p:txBody>
       </p:sp>
       <p:sp>
         <p:nvSpPr>
@@ -13334,6 +14046,10 @@
             <a:prstDash val="solid"/>
           </a:ln>
         </p:spPr>
+        <p:txBody>
+          <a:bodyPr/>
+          <a:p/>
+        </p:txBody>
       </p:sp>
       <p:sp>
         <p:nvSpPr>
@@ -13430,6 +14146,10 @@
             <a:prstDash val="solid"/>
           </a:ln>
         </p:spPr>
+        <p:txBody>
+          <a:bodyPr/>
+          <a:p/>
+        </p:txBody>
       </p:sp>
       <p:sp>
         <p:nvSpPr>
@@ -13455,6 +14175,10 @@
             <a:prstDash val="solid"/>
           </a:ln>
         </p:spPr>
+        <p:txBody>
+          <a:bodyPr/>
+          <a:p/>
+        </p:txBody>
       </p:sp>
       <p:sp>
         <p:nvSpPr>
@@ -13528,7 +14252,7 @@
                 <a:ea typeface="Microsoft YaHei" pitchFamily="34" charset="-122"/>
                 <a:cs typeface="Microsoft YaHei" pitchFamily="34" charset="-120"/>
               </a:rPr>
-              <a:t>Fastener Production Kanban · Cold Heading → Thread Rolling → Heat Treatment → Surface Treatment</a:t>
+              <a:t>Manufacturing Production Kanban · Machining → Precision Machining → Heat Treatment → Surface Treatment</a:t>
             </a:r>
             <a:endParaRPr lang="en-US" sz="1300" dirty="0"/>
           </a:p>
@@ -13558,6 +14282,10 @@
             <a:prstDash val="solid"/>
           </a:ln>
         </p:spPr>
+        <p:txBody>
+          <a:bodyPr/>
+          <a:p/>
+        </p:txBody>
       </p:sp>
       <p:sp>
         <p:nvSpPr>
@@ -13624,6 +14352,10 @@
             <a:prstDash val="solid"/>
           </a:ln>
         </p:spPr>
+        <p:txBody>
+          <a:bodyPr/>
+          <a:p/>
+        </p:txBody>
       </p:sp>
       <p:sp>
         <p:nvSpPr>
@@ -13722,6 +14454,10 @@
             <a:prstDash val="solid"/>
           </a:ln>
         </p:spPr>
+        <p:txBody>
+          <a:bodyPr/>
+          <a:p/>
+        </p:txBody>
       </p:sp>
       <p:sp>
         <p:nvSpPr>
@@ -13749,6 +14485,10 @@
             <a:prstDash val="solid"/>
           </a:ln>
         </p:spPr>
+        <p:txBody>
+          <a:bodyPr/>
+          <a:p/>
+        </p:txBody>
       </p:sp>
       <p:sp>
         <p:nvSpPr>
@@ -13847,6 +14587,10 @@
           </a:solidFill>
           <a:ln/>
         </p:spPr>
+        <p:txBody>
+          <a:bodyPr/>
+          <a:p/>
+        </p:txBody>
       </p:sp>
       <p:sp>
         <p:nvSpPr>
@@ -13874,6 +14618,10 @@
             <a:prstDash val="solid"/>
           </a:ln>
         </p:spPr>
+        <p:txBody>
+          <a:bodyPr/>
+          <a:p/>
+        </p:txBody>
       </p:sp>
       <p:sp>
         <p:nvSpPr>
@@ -13908,7 +14656,7 @@
                 <a:ea typeface="Microsoft YaHei" pitchFamily="34" charset="-122"/>
                 <a:cs typeface="Microsoft YaHei" pitchFamily="34" charset="-120"/>
               </a:rPr>
-              <a:t>冷镦</a:t>
+              <a:t>机加工</a:t>
             </a:r>
             <a:endParaRPr lang="en-US" sz="900" dirty="0"/>
           </a:p>
@@ -13972,6 +14720,10 @@
             <a:prstDash val="solid"/>
           </a:ln>
         </p:spPr>
+        <p:txBody>
+          <a:bodyPr/>
+          <a:p/>
+        </p:txBody>
       </p:sp>
       <p:sp>
         <p:nvSpPr>
@@ -13999,6 +14751,10 @@
             <a:prstDash val="solid"/>
           </a:ln>
         </p:spPr>
+        <p:txBody>
+          <a:bodyPr/>
+          <a:p/>
+        </p:txBody>
       </p:sp>
       <p:sp>
         <p:nvSpPr>
@@ -14097,6 +14853,10 @@
           </a:solidFill>
           <a:ln/>
         </p:spPr>
+        <p:txBody>
+          <a:bodyPr/>
+          <a:p/>
+        </p:txBody>
       </p:sp>
       <p:sp>
         <p:nvSpPr>
@@ -14124,6 +14884,10 @@
             <a:prstDash val="solid"/>
           </a:ln>
         </p:spPr>
+        <p:txBody>
+          <a:bodyPr/>
+          <a:p/>
+        </p:txBody>
       </p:sp>
       <p:sp>
         <p:nvSpPr>
@@ -14158,7 +14922,7 @@
                 <a:ea typeface="Microsoft YaHei" pitchFamily="34" charset="-122"/>
                 <a:cs typeface="Microsoft YaHei" pitchFamily="34" charset="-120"/>
               </a:rPr>
-              <a:t>搓丝</a:t>
+              <a:t>精加工</a:t>
             </a:r>
             <a:endParaRPr lang="en-US" sz="900" dirty="0"/>
           </a:p>
@@ -14222,6 +14986,10 @@
             <a:prstDash val="solid"/>
           </a:ln>
         </p:spPr>
+        <p:txBody>
+          <a:bodyPr/>
+          <a:p/>
+        </p:txBody>
       </p:sp>
       <p:sp>
         <p:nvSpPr>
@@ -14249,6 +15017,10 @@
             <a:prstDash val="solid"/>
           </a:ln>
         </p:spPr>
+        <p:txBody>
+          <a:bodyPr/>
+          <a:p/>
+        </p:txBody>
       </p:sp>
       <p:sp>
         <p:nvSpPr>
@@ -14347,6 +15119,10 @@
           </a:solidFill>
           <a:ln/>
         </p:spPr>
+        <p:txBody>
+          <a:bodyPr/>
+          <a:p/>
+        </p:txBody>
       </p:sp>
       <p:sp>
         <p:nvSpPr>
@@ -14374,6 +15150,10 @@
             <a:prstDash val="solid"/>
           </a:ln>
         </p:spPr>
+        <p:txBody>
+          <a:bodyPr/>
+          <a:p/>
+        </p:txBody>
       </p:sp>
       <p:sp>
         <p:nvSpPr>
@@ -14472,6 +15252,10 @@
             <a:prstDash val="solid"/>
           </a:ln>
         </p:spPr>
+        <p:txBody>
+          <a:bodyPr/>
+          <a:p/>
+        </p:txBody>
       </p:sp>
       <p:sp>
         <p:nvSpPr>
@@ -14499,6 +15283,10 @@
             <a:prstDash val="solid"/>
           </a:ln>
         </p:spPr>
+        <p:txBody>
+          <a:bodyPr/>
+          <a:p/>
+        </p:txBody>
       </p:sp>
       <p:sp>
         <p:nvSpPr>
@@ -14597,6 +15385,10 @@
           </a:solidFill>
           <a:ln/>
         </p:spPr>
+        <p:txBody>
+          <a:bodyPr/>
+          <a:p/>
+        </p:txBody>
       </p:sp>
       <p:sp>
         <p:nvSpPr>
@@ -14624,6 +15416,10 @@
             <a:prstDash val="solid"/>
           </a:ln>
         </p:spPr>
+        <p:txBody>
+          <a:bodyPr/>
+          <a:p/>
+        </p:txBody>
       </p:sp>
       <p:sp>
         <p:nvSpPr>
@@ -14722,6 +15518,10 @@
             <a:prstDash val="solid"/>
           </a:ln>
         </p:spPr>
+        <p:txBody>
+          <a:bodyPr/>
+          <a:p/>
+        </p:txBody>
       </p:sp>
       <p:sp>
         <p:nvSpPr>
@@ -14749,6 +15549,10 @@
             <a:prstDash val="solid"/>
           </a:ln>
         </p:spPr>
+        <p:txBody>
+          <a:bodyPr/>
+          <a:p/>
+        </p:txBody>
       </p:sp>
       <p:sp>
         <p:nvSpPr>
@@ -14847,6 +15651,10 @@
           </a:solidFill>
           <a:ln/>
         </p:spPr>
+        <p:txBody>
+          <a:bodyPr/>
+          <a:p/>
+        </p:txBody>
       </p:sp>
       <p:sp>
         <p:nvSpPr>
@@ -14874,6 +15682,10 @@
             <a:prstDash val="solid"/>
           </a:ln>
         </p:spPr>
+        <p:txBody>
+          <a:bodyPr/>
+          <a:p/>
+        </p:txBody>
       </p:sp>
       <p:sp>
         <p:nvSpPr>
@@ -14974,6 +15786,10 @@
             <a:prstDash val="solid"/>
           </a:ln>
         </p:spPr>
+        <p:txBody>
+          <a:bodyPr/>
+          <a:p/>
+        </p:txBody>
       </p:sp>
       <p:sp>
         <p:nvSpPr>
@@ -14999,6 +15815,10 @@
             <a:prstDash val="solid"/>
           </a:ln>
         </p:spPr>
+        <p:txBody>
+          <a:bodyPr/>
+          <a:p/>
+        </p:txBody>
       </p:sp>
       <p:sp>
         <p:nvSpPr>
@@ -15065,6 +15885,10 @@
             <a:prstDash val="solid"/>
           </a:ln>
         </p:spPr>
+        <p:txBody>
+          <a:bodyPr/>
+          <a:p/>
+        </p:txBody>
       </p:sp>
       <p:sp>
         <p:nvSpPr>
@@ -15090,6 +15914,10 @@
             <a:prstDash val="solid"/>
           </a:ln>
         </p:spPr>
+        <p:txBody>
+          <a:bodyPr/>
+          <a:p/>
+        </p:txBody>
       </p:sp>
       <p:sp>
         <p:nvSpPr>
@@ -15163,7 +15991,7 @@
                 <a:ea typeface="Microsoft YaHei" pitchFamily="34" charset="-122"/>
                 <a:cs typeface="Microsoft YaHei" pitchFamily="34" charset="-120"/>
               </a:rPr>
-              <a:t>产品: M10×50六角螺栓</a:t>
+              <a:t>产品: 某型号×50工件</a:t>
             </a:r>
             <a:endParaRPr lang="en-US" sz="800" dirty="0"/>
           </a:p>
@@ -15241,7 +16069,7 @@
                 <a:ea typeface="Microsoft YaHei" pitchFamily="34" charset="-122"/>
                 <a:cs typeface="Microsoft YaHei" pitchFamily="34" charset="-120"/>
               </a:rPr>
-              <a:t>工序: 冷镦→搓丝</a:t>
+              <a:t>工序: 机加工→精加工</a:t>
             </a:r>
             <a:endParaRPr lang="en-US" sz="800" dirty="0"/>
           </a:p>
@@ -15351,6 +16179,10 @@
             <a:prstDash val="solid"/>
           </a:ln>
         </p:spPr>
+        <p:txBody>
+          <a:bodyPr/>
+          <a:p/>
+        </p:txBody>
       </p:sp>
       <p:sp>
         <p:nvSpPr>
@@ -15376,6 +16208,10 @@
             <a:prstDash val="solid"/>
           </a:ln>
         </p:spPr>
+        <p:txBody>
+          <a:bodyPr/>
+          <a:p/>
+        </p:txBody>
       </p:sp>
       <p:sp>
         <p:nvSpPr>
@@ -15449,7 +16285,7 @@
                 <a:ea typeface="Microsoft YaHei" pitchFamily="34" charset="-122"/>
                 <a:cs typeface="Microsoft YaHei" pitchFamily="34" charset="-120"/>
               </a:rPr>
-              <a:t>物料: 冷镦半成品</a:t>
+              <a:t>物料: 机加工半成品</a:t>
             </a:r>
             <a:endParaRPr lang="en-US" sz="800" dirty="0"/>
           </a:p>
@@ -15527,7 +16363,7 @@
                 <a:ea typeface="Microsoft YaHei" pitchFamily="34" charset="-122"/>
                 <a:cs typeface="Microsoft YaHei" pitchFamily="34" charset="-120"/>
               </a:rPr>
-              <a:t>从: 冷镦车间</a:t>
+              <a:t>从: 机加工车间</a:t>
             </a:r>
             <a:endParaRPr lang="en-US" sz="800" dirty="0"/>
           </a:p>
@@ -15566,7 +16402,7 @@
                 <a:ea typeface="Microsoft YaHei" pitchFamily="34" charset="-122"/>
                 <a:cs typeface="Microsoft YaHei" pitchFamily="34" charset="-120"/>
               </a:rPr>
-              <a:t>到: 搓丝工位</a:t>
+              <a:t>到: 精加工工位</a:t>
             </a:r>
             <a:endParaRPr lang="en-US" sz="800" dirty="0"/>
           </a:p>
@@ -15637,6 +16473,10 @@
             <a:prstDash val="solid"/>
           </a:ln>
         </p:spPr>
+        <p:txBody>
+          <a:bodyPr/>
+          <a:p/>
+        </p:txBody>
       </p:sp>
       <p:sp>
         <p:nvSpPr>
@@ -15662,6 +16502,10 @@
             <a:prstDash val="solid"/>
           </a:ln>
         </p:spPr>
+        <p:txBody>
+          <a:bodyPr/>
+          <a:p/>
+        </p:txBody>
       </p:sp>
       <p:sp>
         <p:nvSpPr>
@@ -15728,6 +16572,10 @@
             <a:prstDash val="solid"/>
           </a:ln>
         </p:spPr>
+        <p:txBody>
+          <a:bodyPr/>
+          <a:p/>
+        </p:txBody>
       </p:sp>
       <p:sp>
         <p:nvSpPr>
@@ -15833,6 +16681,10 @@
             <a:prstDash val="solid"/>
           </a:ln>
         </p:spPr>
+        <p:txBody>
+          <a:bodyPr/>
+          <a:p/>
+        </p:txBody>
       </p:sp>
       <p:sp>
         <p:nvSpPr>
@@ -15938,6 +16790,10 @@
             <a:prstDash val="solid"/>
           </a:ln>
         </p:spPr>
+        <p:txBody>
+          <a:bodyPr/>
+          <a:p/>
+        </p:txBody>
       </p:sp>
       <p:sp>
         <p:nvSpPr>
@@ -16043,6 +16899,10 @@
             <a:prstDash val="solid"/>
           </a:ln>
         </p:spPr>
+        <p:txBody>
+          <a:bodyPr/>
+          <a:p/>
+        </p:txBody>
       </p:sp>
       <p:sp>
         <p:nvSpPr>
@@ -16148,6 +17008,10 @@
             <a:prstDash val="solid"/>
           </a:ln>
         </p:spPr>
+        <p:txBody>
+          <a:bodyPr/>
+          <a:p/>
+        </p:txBody>
       </p:sp>
       <p:sp>
         <p:nvSpPr>
@@ -16253,6 +17117,10 @@
             <a:prstDash val="solid"/>
           </a:ln>
         </p:spPr>
+        <p:txBody>
+          <a:bodyPr/>
+          <a:p/>
+        </p:txBody>
       </p:sp>
       <p:sp>
         <p:nvSpPr>
@@ -16358,6 +17226,10 @@
             <a:prstDash val="solid"/>
           </a:ln>
         </p:spPr>
+        <p:txBody>
+          <a:bodyPr/>
+          <a:p/>
+        </p:txBody>
       </p:sp>
       <p:sp>
         <p:nvSpPr>
@@ -16392,7 +17264,7 @@
                 <a:ea typeface="Microsoft YaHei" pitchFamily="34" charset="-122"/>
                 <a:cs typeface="Microsoft YaHei" pitchFamily="34" charset="-120"/>
               </a:rPr>
-              <a:t>实施效果：某紧固件厂推行看板后，在制品库存降低45%，交期缩短30%，换线时间减少25%，月产能提升15%</a:t>
+              <a:t>实施效果：某工厂推行看板后，在制品库存降低45%，交期缩短30%，换线时间减少25%，月产能提升15%</a:t>
             </a:r>
             <a:endParaRPr lang="en-US" sz="900" dirty="0"/>
           </a:p>
@@ -16454,6 +17326,10 @@
             <a:prstDash val="solid"/>
           </a:ln>
         </p:spPr>
+        <p:txBody>
+          <a:bodyPr/>
+          <a:p/>
+        </p:txBody>
       </p:sp>
       <p:sp>
         <p:nvSpPr>
@@ -16479,6 +17355,10 @@
             <a:prstDash val="solid"/>
           </a:ln>
         </p:spPr>
+        <p:txBody>
+          <a:bodyPr/>
+          <a:p/>
+        </p:txBody>
       </p:sp>
       <p:sp>
         <p:nvSpPr>
@@ -16582,6 +17462,10 @@
             <a:prstDash val="solid"/>
           </a:ln>
         </p:spPr>
+        <p:txBody>
+          <a:bodyPr/>
+          <a:p/>
+        </p:txBody>
       </p:sp>
       <p:sp>
         <p:nvSpPr>
@@ -16648,6 +17532,10 @@
             <a:prstDash val="solid"/>
           </a:ln>
         </p:spPr>
+        <p:txBody>
+          <a:bodyPr/>
+          <a:p/>
+        </p:txBody>
       </p:sp>
       <p:sp>
         <p:nvSpPr>
@@ -16673,6 +17561,10 @@
             <a:prstDash val="solid"/>
           </a:ln>
         </p:spPr>
+        <p:txBody>
+          <a:bodyPr/>
+          <a:p/>
+        </p:txBody>
       </p:sp>
       <p:sp>
         <p:nvSpPr>
@@ -16737,6 +17629,10 @@
             <a:prstDash val="solid"/>
           </a:ln>
         </p:spPr>
+        <p:txBody>
+          <a:bodyPr/>
+          <a:p/>
+        </p:txBody>
       </p:sp>
       <p:sp>
         <p:nvSpPr>
@@ -16852,6 +17748,10 @@
             <a:prstDash val="solid"/>
           </a:ln>
         </p:spPr>
+        <p:txBody>
+          <a:bodyPr/>
+          <a:p/>
+        </p:txBody>
       </p:sp>
       <p:sp>
         <p:nvSpPr>
@@ -16967,6 +17867,10 @@
             <a:prstDash val="solid"/>
           </a:ln>
         </p:spPr>
+        <p:txBody>
+          <a:bodyPr/>
+          <a:p/>
+        </p:txBody>
       </p:sp>
       <p:sp>
         <p:nvSpPr>
@@ -17050,6 +17954,10 @@
             <a:prstDash val="solid"/>
           </a:ln>
         </p:spPr>
+        <p:txBody>
+          <a:bodyPr/>
+          <a:p/>
+        </p:txBody>
       </p:sp>
       <p:sp>
         <p:nvSpPr>
@@ -17075,6 +17983,10 @@
             <a:prstDash val="solid"/>
           </a:ln>
         </p:spPr>
+        <p:txBody>
+          <a:bodyPr/>
+          <a:p/>
+        </p:txBody>
       </p:sp>
       <p:sp>
         <p:nvSpPr>
@@ -17531,6 +18443,10 @@
             <a:prstDash val="solid"/>
           </a:ln>
         </p:spPr>
+        <p:txBody>
+          <a:bodyPr/>
+          <a:p/>
+        </p:txBody>
       </p:sp>
       <p:sp>
         <p:nvSpPr>
@@ -17597,6 +18513,10 @@
             <a:prstDash val="solid"/>
           </a:ln>
         </p:spPr>
+        <p:txBody>
+          <a:bodyPr/>
+          <a:p/>
+        </p:txBody>
       </p:sp>
       <p:sp>
         <p:nvSpPr>
@@ -17617,6 +18537,10 @@
           </a:solidFill>
           <a:ln/>
         </p:spPr>
+        <p:txBody>
+          <a:bodyPr/>
+          <a:p/>
+        </p:txBody>
       </p:sp>
       <p:sp>
         <p:nvSpPr>
@@ -17761,6 +18685,10 @@
             <a:prstDash val="solid"/>
           </a:ln>
         </p:spPr>
+        <p:txBody>
+          <a:bodyPr/>
+          <a:p/>
+        </p:txBody>
       </p:sp>
       <p:sp>
         <p:nvSpPr>
@@ -17781,6 +18709,10 @@
           </a:solidFill>
           <a:ln/>
         </p:spPr>
+        <p:txBody>
+          <a:bodyPr/>
+          <a:p/>
+        </p:txBody>
       </p:sp>
       <p:sp>
         <p:nvSpPr>
@@ -17925,6 +18857,10 @@
             <a:prstDash val="solid"/>
           </a:ln>
         </p:spPr>
+        <p:txBody>
+          <a:bodyPr/>
+          <a:p/>
+        </p:txBody>
       </p:sp>
       <p:sp>
         <p:nvSpPr>
@@ -17945,6 +18881,10 @@
           </a:solidFill>
           <a:ln/>
         </p:spPr>
+        <p:txBody>
+          <a:bodyPr/>
+          <a:p/>
+        </p:txBody>
       </p:sp>
       <p:sp>
         <p:nvSpPr>
@@ -18089,6 +19029,10 @@
             <a:prstDash val="solid"/>
           </a:ln>
         </p:spPr>
+        <p:txBody>
+          <a:bodyPr/>
+          <a:p/>
+        </p:txBody>
       </p:sp>
       <p:sp>
         <p:nvSpPr>
@@ -18109,6 +19053,10 @@
           </a:solidFill>
           <a:ln/>
         </p:spPr>
+        <p:txBody>
+          <a:bodyPr/>
+          <a:p/>
+        </p:txBody>
       </p:sp>
       <p:sp>
         <p:nvSpPr>
